--- a/粵語詩歌/耶穌基督是主_粵語_小羊詩歌.pptx
+++ b/粵語詩歌/耶穌基督是主_粵語_小羊詩歌.pptx
@@ -9,9 +9,11 @@
     <p:sldId id="258" r:id="rId3"/>
     <p:sldId id="259" r:id="rId4"/>
     <p:sldId id="262" r:id="rId5"/>
-    <p:sldId id="263" r:id="rId6"/>
-    <p:sldId id="264" r:id="rId7"/>
-    <p:sldId id="267" r:id="rId8"/>
+    <p:sldId id="268" r:id="rId6"/>
+    <p:sldId id="263" r:id="rId7"/>
+    <p:sldId id="264" r:id="rId8"/>
+    <p:sldId id="267" r:id="rId9"/>
+    <p:sldId id="269" r:id="rId10"/>
   </p:sldIdLst>
   <p:sldSz cx="12192000" cy="6858000"/>
   <p:notesSz cx="6858000" cy="9144000"/>
@@ -299,7 +301,7 @@
           <a:p>
             <a:fld id="{73FD648D-8B53-4CD8-850C-5D4A2D6A8C55}" type="datetimeFigureOut">
               <a:rPr lang="vi-VN" smtClean="0"/>
-              <a:t>12/04/2025</a:t>
+              <a:t>29/04/2026</a:t>
             </a:fld>
             <a:endParaRPr lang="vi-VN"/>
           </a:p>
@@ -469,7 +471,7 @@
           <a:p>
             <a:fld id="{73FD648D-8B53-4CD8-850C-5D4A2D6A8C55}" type="datetimeFigureOut">
               <a:rPr lang="vi-VN" smtClean="0"/>
-              <a:t>12/04/2025</a:t>
+              <a:t>29/04/2026</a:t>
             </a:fld>
             <a:endParaRPr lang="vi-VN"/>
           </a:p>
@@ -649,7 +651,7 @@
           <a:p>
             <a:fld id="{73FD648D-8B53-4CD8-850C-5D4A2D6A8C55}" type="datetimeFigureOut">
               <a:rPr lang="vi-VN" smtClean="0"/>
-              <a:t>12/04/2025</a:t>
+              <a:t>29/04/2026</a:t>
             </a:fld>
             <a:endParaRPr lang="vi-VN"/>
           </a:p>
@@ -819,7 +821,7 @@
           <a:p>
             <a:fld id="{73FD648D-8B53-4CD8-850C-5D4A2D6A8C55}" type="datetimeFigureOut">
               <a:rPr lang="vi-VN" smtClean="0"/>
-              <a:t>12/04/2025</a:t>
+              <a:t>29/04/2026</a:t>
             </a:fld>
             <a:endParaRPr lang="vi-VN"/>
           </a:p>
@@ -1065,7 +1067,7 @@
           <a:p>
             <a:fld id="{73FD648D-8B53-4CD8-850C-5D4A2D6A8C55}" type="datetimeFigureOut">
               <a:rPr lang="vi-VN" smtClean="0"/>
-              <a:t>12/04/2025</a:t>
+              <a:t>29/04/2026</a:t>
             </a:fld>
             <a:endParaRPr lang="vi-VN"/>
           </a:p>
@@ -1353,7 +1355,7 @@
           <a:p>
             <a:fld id="{73FD648D-8B53-4CD8-850C-5D4A2D6A8C55}" type="datetimeFigureOut">
               <a:rPr lang="vi-VN" smtClean="0"/>
-              <a:t>12/04/2025</a:t>
+              <a:t>29/04/2026</a:t>
             </a:fld>
             <a:endParaRPr lang="vi-VN"/>
           </a:p>
@@ -1775,7 +1777,7 @@
           <a:p>
             <a:fld id="{73FD648D-8B53-4CD8-850C-5D4A2D6A8C55}" type="datetimeFigureOut">
               <a:rPr lang="vi-VN" smtClean="0"/>
-              <a:t>12/04/2025</a:t>
+              <a:t>29/04/2026</a:t>
             </a:fld>
             <a:endParaRPr lang="vi-VN"/>
           </a:p>
@@ -1893,7 +1895,7 @@
           <a:p>
             <a:fld id="{73FD648D-8B53-4CD8-850C-5D4A2D6A8C55}" type="datetimeFigureOut">
               <a:rPr lang="vi-VN" smtClean="0"/>
-              <a:t>12/04/2025</a:t>
+              <a:t>29/04/2026</a:t>
             </a:fld>
             <a:endParaRPr lang="vi-VN"/>
           </a:p>
@@ -1988,7 +1990,7 @@
           <a:p>
             <a:fld id="{73FD648D-8B53-4CD8-850C-5D4A2D6A8C55}" type="datetimeFigureOut">
               <a:rPr lang="vi-VN" smtClean="0"/>
-              <a:t>12/04/2025</a:t>
+              <a:t>29/04/2026</a:t>
             </a:fld>
             <a:endParaRPr lang="vi-VN"/>
           </a:p>
@@ -2265,7 +2267,7 @@
           <a:p>
             <a:fld id="{73FD648D-8B53-4CD8-850C-5D4A2D6A8C55}" type="datetimeFigureOut">
               <a:rPr lang="vi-VN" smtClean="0"/>
-              <a:t>12/04/2025</a:t>
+              <a:t>29/04/2026</a:t>
             </a:fld>
             <a:endParaRPr lang="vi-VN"/>
           </a:p>
@@ -2522,7 +2524,7 @@
           <a:p>
             <a:fld id="{73FD648D-8B53-4CD8-850C-5D4A2D6A8C55}" type="datetimeFigureOut">
               <a:rPr lang="vi-VN" smtClean="0"/>
-              <a:t>12/04/2025</a:t>
+              <a:t>29/04/2026</a:t>
             </a:fld>
             <a:endParaRPr lang="vi-VN"/>
           </a:p>
@@ -2738,7 +2740,7 @@
           <a:p>
             <a:fld id="{73FD648D-8B53-4CD8-850C-5D4A2D6A8C55}" type="datetimeFigureOut">
               <a:rPr lang="vi-VN" smtClean="0"/>
-              <a:t>12/04/2025</a:t>
+              <a:t>29/04/2026</a:t>
             </a:fld>
             <a:endParaRPr lang="vi-VN"/>
           </a:p>
@@ -3668,27 +3670,17 @@
                 <a:latin typeface="Microsoft JhengHei" panose="020B0604030504040204" pitchFamily="34" charset="-120"/>
                 <a:ea typeface="Microsoft JhengHei" panose="020B0604030504040204" pitchFamily="34" charset="-120"/>
               </a:rPr>
-              <a:t> ) ( 2</a:t>
-            </a:r>
-            <a:r>
-              <a:rPr lang="zh-CN" altLang="en-US" sz="4000" b="1" dirty="0">
+              <a:t> </a:t>
+            </a:r>
+            <a:r>
+              <a:rPr lang="en-US" sz="4000" b="1" dirty="0" smtClean="0">
                 <a:solidFill>
                   <a:srgbClr val="660033"/>
                 </a:solidFill>
                 <a:latin typeface="Microsoft JhengHei" panose="020B0604030504040204" pitchFamily="34" charset="-120"/>
                 <a:ea typeface="Microsoft JhengHei" panose="020B0604030504040204" pitchFamily="34" charset="-120"/>
               </a:rPr>
-              <a:t>次</a:t>
-            </a:r>
-            <a:r>
-              <a:rPr lang="en-US" sz="4000" b="1" dirty="0">
-                <a:solidFill>
-                  <a:srgbClr val="660033"/>
-                </a:solidFill>
-                <a:latin typeface="Microsoft JhengHei" panose="020B0604030504040204" pitchFamily="34" charset="-120"/>
-                <a:ea typeface="Microsoft JhengHei" panose="020B0604030504040204" pitchFamily="34" charset="-120"/>
-              </a:rPr>
-              <a:t> )</a:t>
+              <a:t>)</a:t>
             </a:r>
             <a:endParaRPr lang="vi-VN" sz="4000" b="1" dirty="0">
               <a:solidFill>
@@ -3762,7 +3754,7 @@
                 <a:latin typeface="Microsoft JhengHei" pitchFamily="34" charset="-120"/>
                 <a:ea typeface="Microsoft JhengHei" pitchFamily="34" charset="-120"/>
               </a:rPr>
-              <a:t>來吧  敬拜頌讚我主</a:t>
+              <a:t>萬膝皆俯拜  萬口皆宣告</a:t>
             </a:r>
             <a:endParaRPr lang="en-US" altLang="zh-TW" sz="6400" b="1" dirty="0">
               <a:solidFill>
@@ -3784,7 +3776,17 @@
                 <a:latin typeface="Microsoft JhengHei" pitchFamily="34" charset="-120"/>
                 <a:ea typeface="Microsoft JhengHei" pitchFamily="34" charset="-120"/>
               </a:rPr>
-              <a:t>榮耀敬拜萬世君王</a:t>
+              <a:t>耶穌基</a:t>
+            </a:r>
+            <a:r>
+              <a:rPr lang="zh-TW" altLang="en-US" sz="6400" b="1" dirty="0">
+                <a:solidFill>
+                  <a:srgbClr val="660033"/>
+                </a:solidFill>
+                <a:latin typeface="Microsoft JhengHei" pitchFamily="34" charset="-120"/>
+                <a:ea typeface="Microsoft JhengHei" pitchFamily="34" charset="-120"/>
+              </a:rPr>
+              <a:t>督祢是王</a:t>
             </a:r>
             <a:endParaRPr lang="en-US" altLang="zh-TW" sz="6400" b="1" dirty="0">
               <a:solidFill>
@@ -3804,8 +3806,8 @@
         </p:nvSpPr>
         <p:spPr>
           <a:xfrm>
-            <a:off x="0" y="5342585"/>
-            <a:ext cx="12192000" cy="646331"/>
+            <a:off x="0" y="5253203"/>
+            <a:ext cx="12192000" cy="707886"/>
           </a:xfrm>
           <a:prstGeom prst="rect">
             <a:avLst/>
@@ -3820,7 +3822,7 @@
           <a:p>
             <a:pPr algn="ctr"/>
             <a:r>
-              <a:rPr lang="en-US" sz="3600" b="1" dirty="0">
+              <a:rPr lang="en-US" sz="4000" b="1" dirty="0">
                 <a:solidFill>
                   <a:srgbClr val="660033"/>
                 </a:solidFill>
@@ -3830,40 +3832,39 @@
               <a:t>( </a:t>
             </a:r>
             <a:r>
-              <a:rPr lang="zh-CN" altLang="en-US" sz="3600" b="1" dirty="0">
+              <a:rPr lang="zh-CN" altLang="en-US" sz="4000" b="1" dirty="0">
                 <a:solidFill>
                   <a:srgbClr val="660033"/>
                 </a:solidFill>
                 <a:latin typeface="Microsoft JhengHei" panose="020B0604030504040204" pitchFamily="34" charset="-120"/>
                 <a:ea typeface="Microsoft JhengHei" panose="020B0604030504040204" pitchFamily="34" charset="-120"/>
               </a:rPr>
-              <a:t>正歌 </a:t>
-            </a:r>
-            <a:r>
-              <a:rPr lang="en-US" altLang="zh-CN" sz="3600" b="1" dirty="0">
+              <a:t>副歌 </a:t>
+            </a:r>
+            <a:r>
+              <a:rPr lang="en-US" altLang="zh-CN" sz="4000" b="1" dirty="0">
                 <a:solidFill>
                   <a:srgbClr val="660033"/>
                 </a:solidFill>
                 <a:latin typeface="Microsoft JhengHei" panose="020B0604030504040204" pitchFamily="34" charset="-120"/>
                 <a:ea typeface="Microsoft JhengHei" panose="020B0604030504040204" pitchFamily="34" charset="-120"/>
               </a:rPr>
-              <a:t>2</a:t>
-            </a:r>
-            <a:r>
-              <a:rPr lang="en-US" sz="3600" b="1" dirty="0">
+              <a:t>1</a:t>
+            </a:r>
+            <a:r>
+              <a:rPr lang="en-US" sz="4000" b="1" dirty="0">
                 <a:solidFill>
                   <a:srgbClr val="660033"/>
                 </a:solidFill>
                 <a:latin typeface="Microsoft JhengHei" panose="020B0604030504040204" pitchFamily="34" charset="-120"/>
                 <a:ea typeface="Microsoft JhengHei" panose="020B0604030504040204" pitchFamily="34" charset="-120"/>
               </a:rPr>
-              <a:t> )</a:t>
-            </a:r>
-            <a:endParaRPr lang="vi-VN" sz="3600" b="1" dirty="0">
+              <a:t> ) </a:t>
+            </a:r>
+            <a:endParaRPr lang="vi-VN" sz="4000" b="1" dirty="0">
               <a:solidFill>
                 <a:srgbClr val="660033"/>
               </a:solidFill>
-              <a:latin typeface="Microsoft JhengHei" panose="020B0604030504040204" pitchFamily="34" charset="-120"/>
               <a:ea typeface="Microsoft JhengHei" panose="020B0604030504040204" pitchFamily="34" charset="-120"/>
             </a:endParaRPr>
           </a:p>
@@ -3872,7 +3873,7 @@
     </p:spTree>
     <p:extLst>
       <p:ext uri="{BB962C8B-B14F-4D97-AF65-F5344CB8AC3E}">
-        <p14:creationId xmlns:p14="http://schemas.microsoft.com/office/powerpoint/2010/main" val="796804153"/>
+        <p14:creationId xmlns:p14="http://schemas.microsoft.com/office/powerpoint/2010/main" val="2795638464"/>
       </p:ext>
     </p:extLst>
   </p:cSld>
@@ -3932,7 +3933,7 @@
                 <a:latin typeface="Microsoft JhengHei" pitchFamily="34" charset="-120"/>
                 <a:ea typeface="Microsoft JhengHei" pitchFamily="34" charset="-120"/>
               </a:rPr>
-              <a:t>全地讚美直到永久</a:t>
+              <a:t>來吧  敬拜頌讚我主</a:t>
             </a:r>
             <a:endParaRPr lang="en-US" altLang="zh-TW" sz="6400" b="1" dirty="0">
               <a:solidFill>
@@ -3954,7 +3955,7 @@
                 <a:latin typeface="Microsoft JhengHei" pitchFamily="34" charset="-120"/>
                 <a:ea typeface="Microsoft JhengHei" pitchFamily="34" charset="-120"/>
               </a:rPr>
-              <a:t>敬拜歸於祢</a:t>
+              <a:t>榮耀敬拜萬世君王</a:t>
             </a:r>
             <a:endParaRPr lang="en-US" altLang="zh-TW" sz="6400" b="1" dirty="0">
               <a:solidFill>
@@ -4042,7 +4043,7 @@
     </p:spTree>
     <p:extLst>
       <p:ext uri="{BB962C8B-B14F-4D97-AF65-F5344CB8AC3E}">
-        <p14:creationId xmlns:p14="http://schemas.microsoft.com/office/powerpoint/2010/main" val="587962328"/>
+        <p14:creationId xmlns:p14="http://schemas.microsoft.com/office/powerpoint/2010/main" val="796804153"/>
       </p:ext>
     </p:extLst>
   </p:cSld>
@@ -4102,6 +4103,176 @@
                 <a:latin typeface="Microsoft JhengHei" pitchFamily="34" charset="-120"/>
                 <a:ea typeface="Microsoft JhengHei" pitchFamily="34" charset="-120"/>
               </a:rPr>
+              <a:t>全地讚美直到永久</a:t>
+            </a:r>
+            <a:endParaRPr lang="en-US" altLang="zh-TW" sz="6400" b="1" dirty="0">
+              <a:solidFill>
+                <a:srgbClr val="660033"/>
+              </a:solidFill>
+              <a:latin typeface="Microsoft JhengHei" pitchFamily="34" charset="-120"/>
+              <a:ea typeface="Microsoft JhengHei" pitchFamily="34" charset="-120"/>
+            </a:endParaRPr>
+          </a:p>
+          <a:p>
+            <a:pPr algn="ctr">
+              <a:buNone/>
+            </a:pPr>
+            <a:r>
+              <a:rPr lang="zh-TW" altLang="en-US" sz="6400" b="1" dirty="0">
+                <a:solidFill>
+                  <a:srgbClr val="660033"/>
+                </a:solidFill>
+                <a:latin typeface="Microsoft JhengHei" pitchFamily="34" charset="-120"/>
+                <a:ea typeface="Microsoft JhengHei" pitchFamily="34" charset="-120"/>
+              </a:rPr>
+              <a:t>敬拜歸於祢</a:t>
+            </a:r>
+            <a:endParaRPr lang="en-US" altLang="zh-TW" sz="6400" b="1" dirty="0">
+              <a:solidFill>
+                <a:srgbClr val="660033"/>
+              </a:solidFill>
+              <a:latin typeface="Microsoft JhengHei" pitchFamily="34" charset="-120"/>
+              <a:ea typeface="Microsoft JhengHei" pitchFamily="34" charset="-120"/>
+            </a:endParaRPr>
+          </a:p>
+        </p:txBody>
+      </p:sp>
+      <p:sp>
+        <p:nvSpPr>
+          <p:cNvPr id="3" name="TextBox 2"/>
+          <p:cNvSpPr txBox="1"/>
+          <p:nvPr/>
+        </p:nvSpPr>
+        <p:spPr>
+          <a:xfrm>
+            <a:off x="0" y="5342585"/>
+            <a:ext cx="12192000" cy="646331"/>
+          </a:xfrm>
+          <a:prstGeom prst="rect">
+            <a:avLst/>
+          </a:prstGeom>
+          <a:noFill/>
+        </p:spPr>
+        <p:txBody>
+          <a:bodyPr wrap="square" rtlCol="0">
+            <a:spAutoFit/>
+          </a:bodyPr>
+          <a:lstStyle/>
+          <a:p>
+            <a:pPr algn="ctr"/>
+            <a:r>
+              <a:rPr lang="en-US" sz="3600" b="1" dirty="0">
+                <a:solidFill>
+                  <a:srgbClr val="660033"/>
+                </a:solidFill>
+                <a:latin typeface="Microsoft JhengHei" panose="020B0604030504040204" pitchFamily="34" charset="-120"/>
+                <a:ea typeface="Microsoft JhengHei" panose="020B0604030504040204" pitchFamily="34" charset="-120"/>
+              </a:rPr>
+              <a:t>( </a:t>
+            </a:r>
+            <a:r>
+              <a:rPr lang="zh-CN" altLang="en-US" sz="3600" b="1" dirty="0">
+                <a:solidFill>
+                  <a:srgbClr val="660033"/>
+                </a:solidFill>
+                <a:latin typeface="Microsoft JhengHei" panose="020B0604030504040204" pitchFamily="34" charset="-120"/>
+                <a:ea typeface="Microsoft JhengHei" panose="020B0604030504040204" pitchFamily="34" charset="-120"/>
+              </a:rPr>
+              <a:t>正歌 </a:t>
+            </a:r>
+            <a:r>
+              <a:rPr lang="en-US" altLang="zh-CN" sz="3600" b="1" dirty="0">
+                <a:solidFill>
+                  <a:srgbClr val="660033"/>
+                </a:solidFill>
+                <a:latin typeface="Microsoft JhengHei" panose="020B0604030504040204" pitchFamily="34" charset="-120"/>
+                <a:ea typeface="Microsoft JhengHei" panose="020B0604030504040204" pitchFamily="34" charset="-120"/>
+              </a:rPr>
+              <a:t>2</a:t>
+            </a:r>
+            <a:r>
+              <a:rPr lang="en-US" sz="3600" b="1" dirty="0">
+                <a:solidFill>
+                  <a:srgbClr val="660033"/>
+                </a:solidFill>
+                <a:latin typeface="Microsoft JhengHei" panose="020B0604030504040204" pitchFamily="34" charset="-120"/>
+                <a:ea typeface="Microsoft JhengHei" panose="020B0604030504040204" pitchFamily="34" charset="-120"/>
+              </a:rPr>
+              <a:t> )</a:t>
+            </a:r>
+            <a:endParaRPr lang="vi-VN" sz="3600" b="1" dirty="0">
+              <a:solidFill>
+                <a:srgbClr val="660033"/>
+              </a:solidFill>
+              <a:latin typeface="Microsoft JhengHei" panose="020B0604030504040204" pitchFamily="34" charset="-120"/>
+              <a:ea typeface="Microsoft JhengHei" panose="020B0604030504040204" pitchFamily="34" charset="-120"/>
+            </a:endParaRPr>
+          </a:p>
+        </p:txBody>
+      </p:sp>
+    </p:spTree>
+    <p:extLst>
+      <p:ext uri="{BB962C8B-B14F-4D97-AF65-F5344CB8AC3E}">
+        <p14:creationId xmlns:p14="http://schemas.microsoft.com/office/powerpoint/2010/main" val="587962328"/>
+      </p:ext>
+    </p:extLst>
+  </p:cSld>
+  <p:clrMapOvr>
+    <a:masterClrMapping/>
+  </p:clrMapOvr>
+</p:sld>
+</file>
+
+<file path=ppt/slides/slide8.xml><?xml version="1.0" encoding="utf-8"?>
+<p:sld xmlns:a="http://schemas.openxmlformats.org/drawingml/2006/main" xmlns:r="http://schemas.openxmlformats.org/officeDocument/2006/relationships" xmlns:p="http://schemas.openxmlformats.org/presentationml/2006/main">
+  <p:cSld>
+    <p:spTree>
+      <p:nvGrpSpPr>
+        <p:cNvPr id="1" name=""/>
+        <p:cNvGrpSpPr/>
+        <p:nvPr/>
+      </p:nvGrpSpPr>
+      <p:grpSpPr>
+        <a:xfrm>
+          <a:off x="0" y="0"/>
+          <a:ext cx="0" cy="0"/>
+          <a:chOff x="0" y="0"/>
+          <a:chExt cx="0" cy="0"/>
+        </a:xfrm>
+      </p:grpSpPr>
+      <p:sp>
+        <p:nvSpPr>
+          <p:cNvPr id="5" name="內容版面配置區 4"/>
+          <p:cNvSpPr>
+            <a:spLocks noGrp="1"/>
+          </p:cNvSpPr>
+          <p:nvPr>
+            <p:ph idx="1"/>
+          </p:nvPr>
+        </p:nvSpPr>
+        <p:spPr>
+          <a:xfrm>
+            <a:off x="0" y="2084853"/>
+            <a:ext cx="12192000" cy="2404863"/>
+          </a:xfrm>
+        </p:spPr>
+        <p:txBody>
+          <a:bodyPr anchor="ctr">
+            <a:normAutofit/>
+          </a:bodyPr>
+          <a:lstStyle/>
+          <a:p>
+            <a:pPr algn="ctr">
+              <a:buNone/>
+            </a:pPr>
+            <a:r>
+              <a:rPr lang="zh-TW" altLang="en-US" sz="6400" b="1" dirty="0">
+                <a:solidFill>
+                  <a:srgbClr val="660033"/>
+                </a:solidFill>
+                <a:latin typeface="Microsoft JhengHei" pitchFamily="34" charset="-120"/>
+                <a:ea typeface="Microsoft JhengHei" pitchFamily="34" charset="-120"/>
+              </a:rPr>
               <a:t>哈利路亞  哈利路亞</a:t>
             </a:r>
             <a:endParaRPr lang="en-US" altLang="zh-TW" sz="6400" b="1" dirty="0">
@@ -4197,27 +4368,7 @@
                 <a:latin typeface="Microsoft JhengHei" panose="020B0604030504040204" pitchFamily="34" charset="-120"/>
                 <a:ea typeface="Microsoft JhengHei" panose="020B0604030504040204" pitchFamily="34" charset="-120"/>
               </a:rPr>
-              <a:t> ) ( 2</a:t>
-            </a:r>
-            <a:r>
-              <a:rPr lang="zh-CN" altLang="en-US" sz="4000" b="1" dirty="0">
-                <a:solidFill>
-                  <a:srgbClr val="660033"/>
-                </a:solidFill>
-                <a:latin typeface="Microsoft JhengHei" panose="020B0604030504040204" pitchFamily="34" charset="-120"/>
-                <a:ea typeface="Microsoft JhengHei" panose="020B0604030504040204" pitchFamily="34" charset="-120"/>
-              </a:rPr>
-              <a:t>次</a:t>
-            </a:r>
-            <a:r>
-              <a:rPr lang="en-US" sz="4000" b="1" dirty="0">
-                <a:solidFill>
-                  <a:srgbClr val="660033"/>
-                </a:solidFill>
-                <a:latin typeface="Microsoft JhengHei" panose="020B0604030504040204" pitchFamily="34" charset="-120"/>
-                <a:ea typeface="Microsoft JhengHei" panose="020B0604030504040204" pitchFamily="34" charset="-120"/>
-              </a:rPr>
-              <a:t> )</a:t>
+              <a:t> ) </a:t>
             </a:r>
             <a:endParaRPr lang="vi-VN" sz="4000" b="1" dirty="0">
               <a:solidFill>
@@ -4232,6 +4383,195 @@
     <p:extLst>
       <p:ext uri="{BB962C8B-B14F-4D97-AF65-F5344CB8AC3E}">
         <p14:creationId xmlns:p14="http://schemas.microsoft.com/office/powerpoint/2010/main" val="1530253755"/>
+      </p:ext>
+    </p:extLst>
+  </p:cSld>
+  <p:clrMapOvr>
+    <a:masterClrMapping/>
+  </p:clrMapOvr>
+</p:sld>
+</file>
+
+<file path=ppt/slides/slide9.xml><?xml version="1.0" encoding="utf-8"?>
+<p:sld xmlns:a="http://schemas.openxmlformats.org/drawingml/2006/main" xmlns:r="http://schemas.openxmlformats.org/officeDocument/2006/relationships" xmlns:p="http://schemas.openxmlformats.org/presentationml/2006/main">
+  <p:cSld>
+    <p:spTree>
+      <p:nvGrpSpPr>
+        <p:cNvPr id="1" name=""/>
+        <p:cNvGrpSpPr/>
+        <p:nvPr/>
+      </p:nvGrpSpPr>
+      <p:grpSpPr>
+        <a:xfrm>
+          <a:off x="0" y="0"/>
+          <a:ext cx="0" cy="0"/>
+          <a:chOff x="0" y="0"/>
+          <a:chExt cx="0" cy="0"/>
+        </a:xfrm>
+      </p:grpSpPr>
+      <p:sp>
+        <p:nvSpPr>
+          <p:cNvPr id="5" name="內容版面配置區 4"/>
+          <p:cNvSpPr>
+            <a:spLocks noGrp="1"/>
+          </p:cNvSpPr>
+          <p:nvPr>
+            <p:ph idx="1"/>
+          </p:nvPr>
+        </p:nvSpPr>
+        <p:spPr>
+          <a:xfrm>
+            <a:off x="0" y="2084853"/>
+            <a:ext cx="12192000" cy="2404863"/>
+          </a:xfrm>
+        </p:spPr>
+        <p:txBody>
+          <a:bodyPr anchor="ctr">
+            <a:normAutofit/>
+          </a:bodyPr>
+          <a:lstStyle/>
+          <a:p>
+            <a:pPr algn="ctr">
+              <a:buNone/>
+            </a:pPr>
+            <a:r>
+              <a:rPr lang="zh-TW" altLang="en-US" sz="6400" b="1" dirty="0">
+                <a:solidFill>
+                  <a:srgbClr val="660033"/>
+                </a:solidFill>
+                <a:latin typeface="Microsoft JhengHei" pitchFamily="34" charset="-120"/>
+                <a:ea typeface="Microsoft JhengHei" pitchFamily="34" charset="-120"/>
+              </a:rPr>
+              <a:t>哈利路亞  哈利路亞</a:t>
+            </a:r>
+            <a:endParaRPr lang="en-US" altLang="zh-TW" sz="6400" b="1" dirty="0">
+              <a:solidFill>
+                <a:srgbClr val="660033"/>
+              </a:solidFill>
+              <a:latin typeface="Microsoft JhengHei" pitchFamily="34" charset="-120"/>
+              <a:ea typeface="Microsoft JhengHei" pitchFamily="34" charset="-120"/>
+            </a:endParaRPr>
+          </a:p>
+          <a:p>
+            <a:pPr algn="ctr">
+              <a:buNone/>
+            </a:pPr>
+            <a:r>
+              <a:rPr lang="zh-TW" altLang="en-US" sz="6400" b="1" dirty="0">
+                <a:solidFill>
+                  <a:srgbClr val="660033"/>
+                </a:solidFill>
+                <a:latin typeface="Microsoft JhengHei" pitchFamily="34" charset="-120"/>
+                <a:ea typeface="Microsoft JhengHei" pitchFamily="34" charset="-120"/>
+              </a:rPr>
+              <a:t>耶穌</a:t>
+            </a:r>
+            <a:r>
+              <a:rPr lang="zh-TW" altLang="en-US" sz="6400" b="1">
+                <a:solidFill>
+                  <a:srgbClr val="660033"/>
+                </a:solidFill>
+                <a:latin typeface="Microsoft JhengHei" pitchFamily="34" charset="-120"/>
+                <a:ea typeface="Microsoft JhengHei" pitchFamily="34" charset="-120"/>
+              </a:rPr>
+              <a:t>基</a:t>
+            </a:r>
+            <a:r>
+              <a:rPr lang="zh-TW" altLang="en-US" sz="6400" b="1">
+                <a:solidFill>
+                  <a:srgbClr val="660033"/>
+                </a:solidFill>
+                <a:latin typeface="Microsoft JhengHei" pitchFamily="34" charset="-120"/>
+                <a:ea typeface="Microsoft JhengHei" pitchFamily="34" charset="-120"/>
+              </a:rPr>
+              <a:t>督祢是王</a:t>
+            </a:r>
+            <a:endParaRPr lang="en-US" altLang="zh-TW" sz="6400" b="1" dirty="0">
+              <a:solidFill>
+                <a:srgbClr val="660033"/>
+              </a:solidFill>
+              <a:latin typeface="Microsoft JhengHei" pitchFamily="34" charset="-120"/>
+              <a:ea typeface="Microsoft JhengHei" pitchFamily="34" charset="-120"/>
+            </a:endParaRPr>
+          </a:p>
+        </p:txBody>
+      </p:sp>
+      <p:sp>
+        <p:nvSpPr>
+          <p:cNvPr id="4" name="TextBox 3"/>
+          <p:cNvSpPr txBox="1"/>
+          <p:nvPr/>
+        </p:nvSpPr>
+        <p:spPr>
+          <a:xfrm>
+            <a:off x="0" y="5253203"/>
+            <a:ext cx="12192000" cy="707886"/>
+          </a:xfrm>
+          <a:prstGeom prst="rect">
+            <a:avLst/>
+          </a:prstGeom>
+          <a:noFill/>
+        </p:spPr>
+        <p:txBody>
+          <a:bodyPr wrap="square" rtlCol="0">
+            <a:spAutoFit/>
+          </a:bodyPr>
+          <a:lstStyle/>
+          <a:p>
+            <a:pPr algn="ctr"/>
+            <a:r>
+              <a:rPr lang="en-US" sz="4000" b="1" dirty="0">
+                <a:solidFill>
+                  <a:srgbClr val="660033"/>
+                </a:solidFill>
+                <a:latin typeface="Microsoft JhengHei" panose="020B0604030504040204" pitchFamily="34" charset="-120"/>
+                <a:ea typeface="Microsoft JhengHei" panose="020B0604030504040204" pitchFamily="34" charset="-120"/>
+              </a:rPr>
+              <a:t>( </a:t>
+            </a:r>
+            <a:r>
+              <a:rPr lang="zh-CN" altLang="en-US" sz="4000" b="1" dirty="0">
+                <a:solidFill>
+                  <a:srgbClr val="660033"/>
+                </a:solidFill>
+                <a:latin typeface="Microsoft JhengHei" panose="020B0604030504040204" pitchFamily="34" charset="-120"/>
+                <a:ea typeface="Microsoft JhengHei" panose="020B0604030504040204" pitchFamily="34" charset="-120"/>
+              </a:rPr>
+              <a:t>副歌 </a:t>
+            </a:r>
+            <a:r>
+              <a:rPr lang="en-US" altLang="zh-CN" sz="4000" b="1" dirty="0">
+                <a:solidFill>
+                  <a:srgbClr val="660033"/>
+                </a:solidFill>
+                <a:latin typeface="Microsoft JhengHei" panose="020B0604030504040204" pitchFamily="34" charset="-120"/>
+                <a:ea typeface="Microsoft JhengHei" panose="020B0604030504040204" pitchFamily="34" charset="-120"/>
+              </a:rPr>
+              <a:t>2</a:t>
+            </a:r>
+            <a:r>
+              <a:rPr lang="en-US" sz="4000" b="1" dirty="0">
+                <a:solidFill>
+                  <a:srgbClr val="660033"/>
+                </a:solidFill>
+                <a:latin typeface="Microsoft JhengHei" panose="020B0604030504040204" pitchFamily="34" charset="-120"/>
+                <a:ea typeface="Microsoft JhengHei" panose="020B0604030504040204" pitchFamily="34" charset="-120"/>
+              </a:rPr>
+              <a:t> ) </a:t>
+            </a:r>
+            <a:endParaRPr lang="vi-VN" sz="4000" b="1" dirty="0">
+              <a:solidFill>
+                <a:srgbClr val="660033"/>
+              </a:solidFill>
+              <a:ea typeface="Microsoft JhengHei" panose="020B0604030504040204" pitchFamily="34" charset="-120"/>
+            </a:endParaRPr>
+          </a:p>
+        </p:txBody>
+      </p:sp>
+    </p:spTree>
+    <p:extLst>
+      <p:ext uri="{BB962C8B-B14F-4D97-AF65-F5344CB8AC3E}">
+        <p14:creationId xmlns:p14="http://schemas.microsoft.com/office/powerpoint/2010/main" val="70050534"/>
       </p:ext>
     </p:extLst>
   </p:cSld>
